--- a/sem_5_arm/presentations/caos_5.pptx
+++ b/sem_5_arm/presentations/caos_5.pptx
@@ -276,7 +276,7 @@
           <a:p>
             <a:fld id="{1D8BD707-D9CF-40AE-B4C6-C98DA3205C09}" type="datetimeFigureOut">
               <a:rPr lang="en-US"/>
-              <a:t>10/22/2024</a:t>
+              <a:t>10/8/2025</a:t>
             </a:fld>
             <a:endParaRPr lang="en-US"/>
           </a:p>
@@ -451,7 +451,7 @@
           <a:p>
             <a:fld id="{1D8BD707-D9CF-40AE-B4C6-C98DA3205C09}" type="datetimeFigureOut">
               <a:rPr lang="en-US"/>
-              <a:t>10/22/2024</a:t>
+              <a:t>10/8/2025</a:t>
             </a:fld>
             <a:endParaRPr lang="en-US"/>
           </a:p>
@@ -665,7 +665,7 @@
           <a:p>
             <a:fld id="{1D8BD707-D9CF-40AE-B4C6-C98DA3205C09}" type="datetimeFigureOut">
               <a:rPr lang="en-US"/>
-              <a:t>10/22/2024</a:t>
+              <a:t>10/8/2025</a:t>
             </a:fld>
             <a:endParaRPr lang="en-US"/>
           </a:p>
@@ -813,7 +813,7 @@
           <a:p>
             <a:fld id="{1D8BD707-D9CF-40AE-B4C6-C98DA3205C09}" type="datetimeFigureOut">
               <a:rPr lang="en-US"/>
-              <a:t>10/22/2024</a:t>
+              <a:t>10/8/2025</a:t>
             </a:fld>
             <a:endParaRPr lang="en-US"/>
           </a:p>
@@ -932,7 +932,7 @@
           <a:p>
             <a:fld id="{1D8BD707-D9CF-40AE-B4C6-C98DA3205C09}" type="datetimeFigureOut">
               <a:rPr lang="en-US"/>
-              <a:t>10/22/2024</a:t>
+              <a:t>10/8/2025</a:t>
             </a:fld>
             <a:endParaRPr lang="en-US"/>
           </a:p>
@@ -1155,7 +1155,7 @@
           <a:p>
             <a:fld id="{1D8BD707-D9CF-40AE-B4C6-C98DA3205C09}" type="datetimeFigureOut">
               <a:rPr lang="en-US"/>
-              <a:t>10/22/2024</a:t>
+              <a:t>10/8/2025</a:t>
             </a:fld>
             <a:endParaRPr lang="en-US"/>
           </a:p>
@@ -4657,7 +4657,7 @@
               <a:t> </a:t>
             </a:r>
             <a:r>
-              <a:rPr sz="4400" spc="-130" dirty="0">
+              <a:rPr sz="4400" spc="-130" dirty="0" err="1">
                 <a:latin typeface="Arial" panose="020B0604020202020204" pitchFamily="34" charset="0"/>
                 <a:cs typeface="Arial" panose="020B0604020202020204" pitchFamily="34" charset="0"/>
               </a:rPr>
@@ -4678,32 +4678,11 @@
               <a:t>M1</a:t>
             </a:r>
             <a:r>
-              <a:rPr sz="4400" spc="-5" dirty="0">
-                <a:latin typeface="Arial" panose="020B0604020202020204" pitchFamily="34" charset="0"/>
-                <a:cs typeface="Arial" panose="020B0604020202020204" pitchFamily="34" charset="0"/>
-              </a:rPr>
-              <a:t> </a:t>
-            </a:r>
-            <a:r>
-              <a:rPr sz="4400" spc="-130" dirty="0">
-                <a:latin typeface="Arial" panose="020B0604020202020204" pitchFamily="34" charset="0"/>
-                <a:cs typeface="Arial" panose="020B0604020202020204" pitchFamily="34" charset="0"/>
-              </a:rPr>
-              <a:t>или</a:t>
-            </a:r>
-            <a:r>
-              <a:rPr sz="4400" spc="-204" dirty="0">
-                <a:latin typeface="Arial" panose="020B0604020202020204" pitchFamily="34" charset="0"/>
-                <a:cs typeface="Arial" panose="020B0604020202020204" pitchFamily="34" charset="0"/>
-              </a:rPr>
-              <a:t> </a:t>
-            </a:r>
-            <a:r>
-              <a:rPr sz="4400" spc="45" dirty="0">
-                <a:latin typeface="Arial" panose="020B0604020202020204" pitchFamily="34" charset="0"/>
-                <a:cs typeface="Arial" panose="020B0604020202020204" pitchFamily="34" charset="0"/>
-              </a:rPr>
-              <a:t>M2</a:t>
+              <a:rPr lang="en-US" sz="4400" spc="-5" dirty="0">
+                <a:latin typeface="Arial" panose="020B0604020202020204" pitchFamily="34" charset="0"/>
+                <a:cs typeface="Arial" panose="020B0604020202020204" pitchFamily="34" charset="0"/>
+              </a:rPr>
+              <a:t>-M4</a:t>
             </a:r>
             <a:endParaRPr sz="4400" dirty="0">
               <a:latin typeface="Arial" panose="020B0604020202020204" pitchFamily="34" charset="0"/>
